--- a/presentations/03_CodeBMB_GitHub_Presentation BCCE26.pptx
+++ b/presentations/03_CodeBMB_GitHub_Presentation BCCE26.pptx
@@ -223,7 +223,7 @@
           <a:p>
             <a:fld id="{0F08B10A-EFDE-FB49-BB1F-0DD9A866CAB9}" type="datetimeFigureOut">
               <a:rPr lang="en-US" smtClean="0"/>
-              <a:t>7/25/26</a:t>
+              <a:t>7/26/26</a:t>
             </a:fld>
             <a:endParaRPr lang="en-US"/>
           </a:p>
@@ -1313,7 +1313,7 @@
           <a:p>
             <a:fld id="{5BCAD085-E8A6-8845-BD4E-CB4CCA059FC4}" type="datetimeFigureOut">
               <a:rPr lang="en-US" smtClean="0"/>
-              <a:t>7/25/26</a:t>
+              <a:t>7/26/26</a:t>
             </a:fld>
             <a:endParaRPr lang="en-US"/>
           </a:p>
@@ -1505,7 +1505,7 @@
           <a:p>
             <a:fld id="{5BCAD085-E8A6-8845-BD4E-CB4CCA059FC4}" type="datetimeFigureOut">
               <a:rPr lang="en-US" smtClean="0"/>
-              <a:t>7/25/26</a:t>
+              <a:t>7/26/26</a:t>
             </a:fld>
             <a:endParaRPr lang="en-US"/>
           </a:p>
@@ -1707,7 +1707,7 @@
           <a:p>
             <a:fld id="{5BCAD085-E8A6-8845-BD4E-CB4CCA059FC4}" type="datetimeFigureOut">
               <a:rPr lang="en-US" smtClean="0"/>
-              <a:t>7/25/26</a:t>
+              <a:t>7/26/26</a:t>
             </a:fld>
             <a:endParaRPr lang="en-US"/>
           </a:p>
@@ -1899,7 +1899,7 @@
           <a:p>
             <a:fld id="{5BCAD085-E8A6-8845-BD4E-CB4CCA059FC4}" type="datetimeFigureOut">
               <a:rPr lang="en-US" smtClean="0"/>
-              <a:t>7/25/26</a:t>
+              <a:t>7/26/26</a:t>
             </a:fld>
             <a:endParaRPr lang="en-US"/>
           </a:p>
@@ -2168,7 +2168,7 @@
           <a:p>
             <a:fld id="{5BCAD085-E8A6-8845-BD4E-CB4CCA059FC4}" type="datetimeFigureOut">
               <a:rPr lang="en-US" smtClean="0"/>
-              <a:t>7/25/26</a:t>
+              <a:t>7/26/26</a:t>
             </a:fld>
             <a:endParaRPr lang="en-US"/>
           </a:p>
@@ -2477,7 +2477,7 @@
           <a:p>
             <a:fld id="{5BCAD085-E8A6-8845-BD4E-CB4CCA059FC4}" type="datetimeFigureOut">
               <a:rPr lang="en-US" smtClean="0"/>
-              <a:t>7/25/26</a:t>
+              <a:t>7/26/26</a:t>
             </a:fld>
             <a:endParaRPr lang="en-US"/>
           </a:p>
@@ -2920,7 +2920,7 @@
           <a:p>
             <a:fld id="{5BCAD085-E8A6-8845-BD4E-CB4CCA059FC4}" type="datetimeFigureOut">
               <a:rPr lang="en-US" smtClean="0"/>
-              <a:t>7/25/26</a:t>
+              <a:t>7/26/26</a:t>
             </a:fld>
             <a:endParaRPr lang="en-US"/>
           </a:p>
@@ -3061,7 +3061,7 @@
           <a:p>
             <a:fld id="{5BCAD085-E8A6-8845-BD4E-CB4CCA059FC4}" type="datetimeFigureOut">
               <a:rPr lang="en-US" smtClean="0"/>
-              <a:t>7/25/26</a:t>
+              <a:t>7/26/26</a:t>
             </a:fld>
             <a:endParaRPr lang="en-US"/>
           </a:p>
@@ -3180,7 +3180,7 @@
           <a:p>
             <a:fld id="{5BCAD085-E8A6-8845-BD4E-CB4CCA059FC4}" type="datetimeFigureOut">
               <a:rPr lang="en-US" smtClean="0"/>
-              <a:t>7/25/26</a:t>
+              <a:t>7/26/26</a:t>
             </a:fld>
             <a:endParaRPr lang="en-US"/>
           </a:p>
@@ -3479,7 +3479,7 @@
           <a:p>
             <a:fld id="{5BCAD085-E8A6-8845-BD4E-CB4CCA059FC4}" type="datetimeFigureOut">
               <a:rPr lang="en-US" smtClean="0"/>
-              <a:t>7/25/26</a:t>
+              <a:t>7/26/26</a:t>
             </a:fld>
             <a:endParaRPr lang="en-US"/>
           </a:p>
@@ -3755,7 +3755,7 @@
           <a:p>
             <a:fld id="{5BCAD085-E8A6-8845-BD4E-CB4CCA059FC4}" type="datetimeFigureOut">
               <a:rPr lang="en-US" smtClean="0"/>
-              <a:t>7/25/26</a:t>
+              <a:t>7/26/26</a:t>
             </a:fld>
             <a:endParaRPr lang="en-US"/>
           </a:p>
@@ -16871,7 +16871,7 @@
         </p:nvSpPr>
         <p:spPr>
           <a:xfrm>
-            <a:off x="914400" y="2307186"/>
+            <a:off x="914400" y="3013242"/>
             <a:ext cx="10789920" cy="566928"/>
           </a:xfrm>
           <a:prstGeom prst="rect">
@@ -16921,7 +16921,7 @@
         </p:nvSpPr>
         <p:spPr>
           <a:xfrm>
-            <a:off x="914400" y="2962169"/>
+            <a:off x="914400" y="3668225"/>
             <a:ext cx="10789920" cy="566928"/>
           </a:xfrm>
           <a:prstGeom prst="rect">
@@ -16971,7 +16971,7 @@
         </p:nvSpPr>
         <p:spPr>
           <a:xfrm>
-            <a:off x="914400" y="3623923"/>
+            <a:off x="914400" y="4329979"/>
             <a:ext cx="10789920" cy="566928"/>
           </a:xfrm>
           <a:prstGeom prst="rect">
@@ -17021,7 +17021,7 @@
         </p:nvSpPr>
         <p:spPr>
           <a:xfrm>
-            <a:off x="914400" y="4285677"/>
+            <a:off x="914400" y="4991733"/>
             <a:ext cx="10789920" cy="566928"/>
           </a:xfrm>
           <a:prstGeom prst="rect">
@@ -17071,7 +17071,7 @@
         </p:nvSpPr>
         <p:spPr>
           <a:xfrm>
-            <a:off x="914400" y="4926192"/>
+            <a:off x="914400" y="5632248"/>
             <a:ext cx="10789920" cy="566928"/>
           </a:xfrm>
           <a:prstGeom prst="rect">
@@ -17444,7 +17444,7 @@
         </p:nvSpPr>
         <p:spPr>
           <a:xfrm>
-            <a:off x="914400" y="2402913"/>
+            <a:off x="914400" y="3108969"/>
             <a:ext cx="15913760" cy="369332"/>
           </a:xfrm>
           <a:prstGeom prst="rect">
@@ -17484,7 +17484,7 @@
         </p:nvSpPr>
         <p:spPr>
           <a:xfrm>
-            <a:off x="914400" y="3077936"/>
+            <a:off x="914400" y="3783992"/>
             <a:ext cx="15913760" cy="369332"/>
           </a:xfrm>
           <a:prstGeom prst="rect">
@@ -17524,7 +17524,7 @@
         </p:nvSpPr>
         <p:spPr>
           <a:xfrm>
-            <a:off x="914400" y="3719649"/>
+            <a:off x="914400" y="4425705"/>
             <a:ext cx="15913760" cy="369332"/>
           </a:xfrm>
           <a:prstGeom prst="rect">
@@ -17584,7 +17584,7 @@
         </p:nvSpPr>
         <p:spPr>
           <a:xfrm>
-            <a:off x="914400" y="4361362"/>
+            <a:off x="914400" y="5067418"/>
             <a:ext cx="15913760" cy="369332"/>
           </a:xfrm>
           <a:prstGeom prst="rect">
@@ -17640,7 +17640,7 @@
         </p:nvSpPr>
         <p:spPr>
           <a:xfrm>
-            <a:off x="914400" y="5031902"/>
+            <a:off x="914400" y="5737958"/>
             <a:ext cx="15913760" cy="369332"/>
           </a:xfrm>
           <a:prstGeom prst="rect">
@@ -17775,7 +17775,7 @@
         </p:nvSpPr>
         <p:spPr>
           <a:xfrm>
-            <a:off x="274320" y="2307186"/>
+            <a:off x="274320" y="3013242"/>
             <a:ext cx="502920" cy="566928"/>
           </a:xfrm>
           <a:prstGeom prst="rect">
@@ -17825,7 +17825,7 @@
         </p:nvSpPr>
         <p:spPr>
           <a:xfrm>
-            <a:off x="274320" y="2352906"/>
+            <a:off x="274320" y="3058962"/>
             <a:ext cx="502920" cy="461665"/>
           </a:xfrm>
           <a:prstGeom prst="rect">
@@ -17841,13 +17841,18 @@
           <a:p>
             <a:pPr algn="ctr"/>
             <a:r>
-              <a:rPr sz="2400" b="1">
+              <a:rPr lang="en-US" sz="2400" b="1" dirty="0">
                 <a:solidFill>
                   <a:srgbClr val="FFFFFF"/>
                 </a:solidFill>
               </a:rPr>
-              <a:t>2</a:t>
-            </a:r>
+              <a:t>3</a:t>
+            </a:r>
+            <a:endParaRPr sz="2400" b="1" dirty="0">
+              <a:solidFill>
+                <a:srgbClr val="FFFFFF"/>
+              </a:solidFill>
+            </a:endParaRPr>
           </a:p>
         </p:txBody>
       </p:sp>
@@ -17865,7 +17870,7 @@
         </p:nvSpPr>
         <p:spPr>
           <a:xfrm>
-            <a:off x="274320" y="2965555"/>
+            <a:off x="274320" y="3671611"/>
             <a:ext cx="502920" cy="566928"/>
           </a:xfrm>
           <a:prstGeom prst="rect">
@@ -17915,7 +17920,7 @@
         </p:nvSpPr>
         <p:spPr>
           <a:xfrm>
-            <a:off x="274320" y="3011274"/>
+            <a:off x="274320" y="3717330"/>
             <a:ext cx="502920" cy="461665"/>
           </a:xfrm>
           <a:prstGeom prst="rect">
@@ -17931,13 +17936,18 @@
           <a:p>
             <a:pPr algn="ctr"/>
             <a:r>
-              <a:rPr sz="2400" b="1">
+              <a:rPr lang="en-US" sz="2400" b="1" dirty="0">
                 <a:solidFill>
                   <a:srgbClr val="FFFFFF"/>
                 </a:solidFill>
               </a:rPr>
-              <a:t>3</a:t>
-            </a:r>
+              <a:t>4</a:t>
+            </a:r>
+            <a:endParaRPr sz="2400" b="1" dirty="0">
+              <a:solidFill>
+                <a:srgbClr val="FFFFFF"/>
+              </a:solidFill>
+            </a:endParaRPr>
           </a:p>
         </p:txBody>
       </p:sp>
@@ -17955,7 +17965,7 @@
         </p:nvSpPr>
         <p:spPr>
           <a:xfrm>
-            <a:off x="274320" y="3623923"/>
+            <a:off x="274320" y="4329979"/>
             <a:ext cx="502920" cy="566928"/>
           </a:xfrm>
           <a:prstGeom prst="rect">
@@ -18007,7 +18017,7 @@
         </p:nvSpPr>
         <p:spPr>
           <a:xfrm>
-            <a:off x="274320" y="3669643"/>
+            <a:off x="274320" y="4375699"/>
             <a:ext cx="502920" cy="461665"/>
           </a:xfrm>
           <a:prstGeom prst="rect">
@@ -18023,13 +18033,18 @@
           <a:p>
             <a:pPr algn="ctr"/>
             <a:r>
-              <a:rPr sz="2400" b="1">
+              <a:rPr lang="en-US" sz="2400" b="1" dirty="0">
                 <a:solidFill>
                   <a:srgbClr val="FFFFFF"/>
                 </a:solidFill>
               </a:rPr>
-              <a:t>4</a:t>
-            </a:r>
+              <a:t>5</a:t>
+            </a:r>
+            <a:endParaRPr sz="2400" b="1" dirty="0">
+              <a:solidFill>
+                <a:srgbClr val="FFFFFF"/>
+              </a:solidFill>
+            </a:endParaRPr>
           </a:p>
         </p:txBody>
       </p:sp>
@@ -18047,7 +18062,7 @@
         </p:nvSpPr>
         <p:spPr>
           <a:xfrm>
-            <a:off x="274320" y="4274736"/>
+            <a:off x="274320" y="4980792"/>
             <a:ext cx="502920" cy="566928"/>
           </a:xfrm>
           <a:prstGeom prst="rect">
@@ -18097,7 +18112,7 @@
         </p:nvSpPr>
         <p:spPr>
           <a:xfrm>
-            <a:off x="274320" y="4320455"/>
+            <a:off x="274320" y="5026511"/>
             <a:ext cx="502920" cy="461665"/>
           </a:xfrm>
           <a:prstGeom prst="rect">
@@ -18118,7 +18133,7 @@
                   <a:srgbClr val="FFFFFF"/>
                 </a:solidFill>
               </a:rPr>
-              <a:t>5</a:t>
+              <a:t>6</a:t>
             </a:r>
             <a:endParaRPr sz="2400" b="1" dirty="0">
               <a:solidFill>
@@ -18142,7 +18157,7 @@
         </p:nvSpPr>
         <p:spPr>
           <a:xfrm>
-            <a:off x="274320" y="4933104"/>
+            <a:off x="274320" y="5639160"/>
             <a:ext cx="502920" cy="566928"/>
           </a:xfrm>
           <a:prstGeom prst="rect">
@@ -18194,7 +18209,7 @@
         </p:nvSpPr>
         <p:spPr>
           <a:xfrm>
-            <a:off x="274320" y="4978824"/>
+            <a:off x="274320" y="5684880"/>
             <a:ext cx="502920" cy="461665"/>
           </a:xfrm>
           <a:prstGeom prst="rect">
@@ -18215,11 +18230,220 @@
                   <a:srgbClr val="FFFFFF"/>
                 </a:solidFill>
               </a:rPr>
-              <a:t>6</a:t>
+              <a:t>7</a:t>
             </a:r>
             <a:endParaRPr sz="2400" b="1" dirty="0">
               <a:solidFill>
                 <a:srgbClr val="FFFFFF"/>
+              </a:solidFill>
+            </a:endParaRPr>
+          </a:p>
+        </p:txBody>
+      </p:sp>
+      <p:sp>
+        <p:nvSpPr>
+          <p:cNvPr id="6" name="Rectangle 5">
+            <a:extLst>
+              <a:ext uri="{FF2B5EF4-FFF2-40B4-BE49-F238E27FC236}">
+                <a16:creationId xmlns:a16="http://schemas.microsoft.com/office/drawing/2014/main" id="{A8D4F1B7-6024-6872-C0B5-BAF39FD77AD5}"/>
+              </a:ext>
+            </a:extLst>
+          </p:cNvPr>
+          <p:cNvSpPr/>
+          <p:nvPr/>
+        </p:nvSpPr>
+        <p:spPr>
+          <a:xfrm>
+            <a:off x="914400" y="2330427"/>
+            <a:ext cx="10789920" cy="566928"/>
+          </a:xfrm>
+          <a:prstGeom prst="rect">
+            <a:avLst/>
+          </a:prstGeom>
+          <a:solidFill>
+            <a:srgbClr val="BDD7EE"/>
+          </a:solidFill>
+          <a:ln>
+            <a:noFill/>
+          </a:ln>
+        </p:spPr>
+        <p:style>
+          <a:lnRef idx="1">
+            <a:schemeClr val="accent1"/>
+          </a:lnRef>
+          <a:fillRef idx="3">
+            <a:schemeClr val="accent1"/>
+          </a:fillRef>
+          <a:effectRef idx="2">
+            <a:schemeClr val="accent1"/>
+          </a:effectRef>
+          <a:fontRef idx="minor">
+            <a:schemeClr val="lt1"/>
+          </a:fontRef>
+        </p:style>
+        <p:txBody>
+          <a:bodyPr rtlCol="0" anchor="ctr"/>
+          <a:lstStyle/>
+          <a:p>
+            <a:pPr algn="ctr"/>
+            <a:endParaRPr sz="2800" dirty="0"/>
+          </a:p>
+        </p:txBody>
+      </p:sp>
+      <p:sp>
+        <p:nvSpPr>
+          <p:cNvPr id="7" name="Rectangle 6">
+            <a:extLst>
+              <a:ext uri="{FF2B5EF4-FFF2-40B4-BE49-F238E27FC236}">
+                <a16:creationId xmlns:a16="http://schemas.microsoft.com/office/drawing/2014/main" id="{679831A5-4D98-6FEA-D91D-AB2723D94EF1}"/>
+              </a:ext>
+            </a:extLst>
+          </p:cNvPr>
+          <p:cNvSpPr/>
+          <p:nvPr/>
+        </p:nvSpPr>
+        <p:spPr>
+          <a:xfrm>
+            <a:off x="274320" y="2330427"/>
+            <a:ext cx="502920" cy="566928"/>
+          </a:xfrm>
+          <a:prstGeom prst="rect">
+            <a:avLst/>
+          </a:prstGeom>
+          <a:solidFill>
+            <a:srgbClr val="2E75B6"/>
+          </a:solidFill>
+          <a:ln>
+            <a:noFill/>
+          </a:ln>
+        </p:spPr>
+        <p:style>
+          <a:lnRef idx="1">
+            <a:schemeClr val="accent1"/>
+          </a:lnRef>
+          <a:fillRef idx="3">
+            <a:schemeClr val="accent1"/>
+          </a:fillRef>
+          <a:effectRef idx="2">
+            <a:schemeClr val="accent1"/>
+          </a:effectRef>
+          <a:fontRef idx="minor">
+            <a:schemeClr val="lt1"/>
+          </a:fontRef>
+        </p:style>
+        <p:txBody>
+          <a:bodyPr rtlCol="0" anchor="ctr"/>
+          <a:lstStyle/>
+          <a:p>
+            <a:pPr algn="ctr"/>
+            <a:endParaRPr sz="2800"/>
+          </a:p>
+        </p:txBody>
+      </p:sp>
+      <p:sp>
+        <p:nvSpPr>
+          <p:cNvPr id="8" name="TextBox 7">
+            <a:extLst>
+              <a:ext uri="{FF2B5EF4-FFF2-40B4-BE49-F238E27FC236}">
+                <a16:creationId xmlns:a16="http://schemas.microsoft.com/office/drawing/2014/main" id="{E3372B08-20B9-A256-79EF-677DF748E5FA}"/>
+              </a:ext>
+            </a:extLst>
+          </p:cNvPr>
+          <p:cNvSpPr txBox="1"/>
+          <p:nvPr/>
+        </p:nvSpPr>
+        <p:spPr>
+          <a:xfrm>
+            <a:off x="274320" y="2376147"/>
+            <a:ext cx="502920" cy="461665"/>
+          </a:xfrm>
+          <a:prstGeom prst="rect">
+            <a:avLst/>
+          </a:prstGeom>
+          <a:noFill/>
+        </p:spPr>
+        <p:txBody>
+          <a:bodyPr wrap="square">
+            <a:spAutoFit/>
+          </a:bodyPr>
+          <a:lstStyle/>
+          <a:p>
+            <a:pPr algn="ctr"/>
+            <a:r>
+              <a:rPr sz="2400" b="1" dirty="0">
+                <a:solidFill>
+                  <a:srgbClr val="FFFFFF"/>
+                </a:solidFill>
+              </a:rPr>
+              <a:t>2</a:t>
+            </a:r>
+          </a:p>
+        </p:txBody>
+      </p:sp>
+      <p:sp>
+        <p:nvSpPr>
+          <p:cNvPr id="9" name="TextBox 8">
+            <a:extLst>
+              <a:ext uri="{FF2B5EF4-FFF2-40B4-BE49-F238E27FC236}">
+                <a16:creationId xmlns:a16="http://schemas.microsoft.com/office/drawing/2014/main" id="{C65E397E-3F62-97EF-16CB-DF24971DEEE4}"/>
+              </a:ext>
+            </a:extLst>
+          </p:cNvPr>
+          <p:cNvSpPr txBox="1"/>
+          <p:nvPr/>
+        </p:nvSpPr>
+        <p:spPr>
+          <a:xfrm>
+            <a:off x="914400" y="2429225"/>
+            <a:ext cx="15913760" cy="369332"/>
+          </a:xfrm>
+          <a:prstGeom prst="rect">
+            <a:avLst/>
+          </a:prstGeom>
+          <a:noFill/>
+        </p:spPr>
+        <p:txBody>
+          <a:bodyPr wrap="square">
+            <a:spAutoFit/>
+          </a:bodyPr>
+          <a:lstStyle/>
+          <a:p>
+            <a:pPr algn="l"/>
+            <a:r>
+              <a:rPr b="0" dirty="0">
+                <a:solidFill>
+                  <a:srgbClr val="404040"/>
+                </a:solidFill>
+              </a:rPr>
+              <a:t>Click </a:t>
+            </a:r>
+            <a:r>
+              <a:rPr lang="en-US" dirty="0">
+                <a:solidFill>
+                  <a:srgbClr val="404040"/>
+                </a:solidFill>
+              </a:rPr>
+              <a:t>the “+ </a:t>
+            </a:r>
+            <a:r>
+              <a:rPr lang="en-US">
+                <a:solidFill>
+                  <a:srgbClr val="404040"/>
+                </a:solidFill>
+              </a:rPr>
+              <a:t>New Notebook” </a:t>
+            </a:r>
+            <a:r>
+              <a:rPr lang="en-US" dirty="0">
+                <a:solidFill>
+                  <a:srgbClr val="404040"/>
+                </a:solidFill>
+              </a:rPr>
+              <a:t>Button</a:t>
+            </a:r>
+            <a:endParaRPr b="0" dirty="0">
+              <a:solidFill>
+                <a:srgbClr val="404040"/>
               </a:solidFill>
             </a:endParaRPr>
           </a:p>
@@ -19111,7 +19335,7 @@
                   <a:srgbClr val="1F3564"/>
                 </a:solidFill>
               </a:rPr>
-              <a:t>File → Save a copy in GitHub</a:t>
+              <a:t>File → Save</a:t>
             </a:r>
             <a:endParaRPr b="1" dirty="0">
               <a:solidFill>
